--- a/evals/previews/plos-data-analysis-workflows/plos-data-analysis-workflows.pptx
+++ b/evals/previews/plos-data-analysis-workflows/plos-data-analysis-workflows.pptx
@@ -2,13 +2,13 @@
 <file path=ppt/presentation.xml><?xml version="1.0" encoding="utf-8"?>
 <p:presentation xmlns:p="http://schemas.openxmlformats.org/presentationml/2006/main">
   <p:sldMasterIdLst>
-    <p:sldMasterId xmlns:r="http://schemas.openxmlformats.org/officeDocument/2006/relationships" id="2147483648" r:id="R80dccf43fe644908"/>
+    <p:sldMasterId xmlns:r="http://schemas.openxmlformats.org/officeDocument/2006/relationships" id="2147483648" r:id="R6015e9d437324136"/>
   </p:sldMasterIdLst>
   <p:notesMasterIdLst>
-    <p:notesMasterId xmlns:r="http://schemas.openxmlformats.org/officeDocument/2006/relationships" r:id="R91d8fcc9c0854e4c"/>
+    <p:notesMasterId xmlns:r="http://schemas.openxmlformats.org/officeDocument/2006/relationships" r:id="R8002ffde83a84658"/>
   </p:notesMasterIdLst>
   <p:sldIdLst>
-    <p:sldId xmlns:r="http://schemas.openxmlformats.org/officeDocument/2006/relationships" id="256" r:id="Rb0acdb93078e4e0b"/>
+    <p:sldId xmlns:r="http://schemas.openxmlformats.org/officeDocument/2006/relationships" id="256" r:id="Re9de3e03750447a4"/>
   </p:sldIdLst>
   <p:sldSz cx="42805350" cy="30279975"/>
   <p:notesSz cx="6858000" cy="9144000"/>
@@ -525,7 +525,7 @@
   </p:cSld>
   <p:clrMap bg1="lt1" tx1="dk1" bg2="lt2" tx2="dk2" accent1="accent1" accent2="accent2" accent3="accent3" accent4="accent4" accent5="accent5" accent6="accent6" hlink="hlink" folHlink="folHlink"/>
   <p:sldLayoutIdLst>
-    <p:sldLayoutId xmlns:r="http://schemas.openxmlformats.org/officeDocument/2006/relationships" id="2147483649" r:id="Rae74f5a74d284ef8"/>
+    <p:sldLayoutId xmlns:r="http://schemas.openxmlformats.org/officeDocument/2006/relationships" id="2147483649" r:id="R0e974ec2f93344b6"/>
   </p:sldLayoutIdLst>
   <p:txStyles>
     <p:titleStyle>
@@ -1076,7 +1076,7 @@
           <p:cNvPr id="92" name="header-band">
             <a:extLst xmlns:a="http://schemas.openxmlformats.org/drawingml/2006/main">
               <a:ext uri="{FF2B5EF4-FFF2-40B4-BE49-F238E27FC236}">
-                <a16:creationId xmlns:a16="http://schemas.microsoft.com/office/drawing/2014/main" id="{716E7688-4A6B-4C1E-B354-1878DF00D94A}"/>
+                <a16:creationId xmlns:a16="http://schemas.microsoft.com/office/drawing/2014/main" id="{C092C8BE-9126-46E9-B7B1-635987C17B2B}"/>
               </a:ext>
             </a:extLst>
           </p:cNvPr>
@@ -1109,7 +1109,7 @@
           <p:cNvPr id="2" name="top-accent">
             <a:extLst xmlns:a="http://schemas.openxmlformats.org/drawingml/2006/main">
               <a:ext uri="{FF2B5EF4-FFF2-40B4-BE49-F238E27FC236}">
-                <a16:creationId xmlns:a16="http://schemas.microsoft.com/office/drawing/2014/main" id="{61FABD70-1C04-41F3-8AF1-C228444B563D}"/>
+                <a16:creationId xmlns:a16="http://schemas.microsoft.com/office/drawing/2014/main" id="{422C3C69-36CB-41D2-AF7A-0425152DB378}"/>
               </a:ext>
             </a:extLst>
           </p:cNvPr>
@@ -1142,7 +1142,7 @@
           <p:cNvPr id="3" name="poster-title">
             <a:extLst xmlns:a="http://schemas.openxmlformats.org/drawingml/2006/main">
               <a:ext uri="{FF2B5EF4-FFF2-40B4-BE49-F238E27FC236}">
-                <a16:creationId xmlns:a16="http://schemas.microsoft.com/office/drawing/2014/main" id="{8E484A14-5A1C-4115-8B9A-154959ACFFAD}"/>
+                <a16:creationId xmlns:a16="http://schemas.microsoft.com/office/drawing/2014/main" id="{66158135-EEFE-4EAB-9641-03FA6CEF083F}"/>
               </a:ext>
             </a:extLst>
           </p:cNvPr>
@@ -1192,7 +1192,7 @@
           <p:cNvPr id="4" name="authors">
             <a:extLst xmlns:a="http://schemas.openxmlformats.org/drawingml/2006/main">
               <a:ext uri="{FF2B5EF4-FFF2-40B4-BE49-F238E27FC236}">
-                <a16:creationId xmlns:a16="http://schemas.microsoft.com/office/drawing/2014/main" id="{A3918801-665D-49A6-A37D-A04C5EA0B68E}"/>
+                <a16:creationId xmlns:a16="http://schemas.microsoft.com/office/drawing/2014/main" id="{074B8D52-288A-4ADC-AB71-179A751887A1}"/>
               </a:ext>
             </a:extLst>
           </p:cNvPr>
@@ -1242,7 +1242,7 @@
           <p:cNvPr id="5" name="affiliations">
             <a:extLst xmlns:a="http://schemas.openxmlformats.org/drawingml/2006/main">
               <a:ext uri="{FF2B5EF4-FFF2-40B4-BE49-F238E27FC236}">
-                <a16:creationId xmlns:a16="http://schemas.microsoft.com/office/drawing/2014/main" id="{8FA590C9-9861-4F06-9C53-D2F66A85A3C4}"/>
+                <a16:creationId xmlns:a16="http://schemas.microsoft.com/office/drawing/2014/main" id="{AA64794F-3855-4772-9CD2-376525B05F9E}"/>
               </a:ext>
             </a:extLst>
           </p:cNvPr>
@@ -1292,7 +1292,7 @@
           <p:cNvPr id="6" name="citation">
             <a:extLst xmlns:a="http://schemas.openxmlformats.org/drawingml/2006/main">
               <a:ext uri="{FF2B5EF4-FFF2-40B4-BE49-F238E27FC236}">
-                <a16:creationId xmlns:a16="http://schemas.microsoft.com/office/drawing/2014/main" id="{12120C93-5EA8-492B-A5A0-DD9AE18A15C2}"/>
+                <a16:creationId xmlns:a16="http://schemas.microsoft.com/office/drawing/2014/main" id="{CDA1975B-ED50-4885-AE3B-3B7F1F0501F2}"/>
               </a:ext>
             </a:extLst>
           </p:cNvPr>
@@ -1342,7 +1342,7 @@
           <p:cNvPr id="7" name="logo-slot-institution-logo">
             <a:extLst xmlns:a="http://schemas.openxmlformats.org/drawingml/2006/main">
               <a:ext uri="{FF2B5EF4-FFF2-40B4-BE49-F238E27FC236}">
-                <a16:creationId xmlns:a16="http://schemas.microsoft.com/office/drawing/2014/main" id="{1272374E-5770-4A82-8285-1AB884989971}"/>
+                <a16:creationId xmlns:a16="http://schemas.microsoft.com/office/drawing/2014/main" id="{077E0D10-67DF-4235-AC1A-B9FBAE44A2B8}"/>
               </a:ext>
             </a:extLst>
           </p:cNvPr>
@@ -1377,7 +1377,7 @@
           <p:cNvPr id="8" name="logo-placeholder-institution-logo">
             <a:extLst xmlns:a="http://schemas.openxmlformats.org/drawingml/2006/main">
               <a:ext uri="{FF2B5EF4-FFF2-40B4-BE49-F238E27FC236}">
-                <a16:creationId xmlns:a16="http://schemas.microsoft.com/office/drawing/2014/main" id="{54C27D0D-F83C-4725-BA33-315A0748F34C}"/>
+                <a16:creationId xmlns:a16="http://schemas.microsoft.com/office/drawing/2014/main" id="{497D079A-46F0-49BB-9297-0B8647E0B6CB}"/>
               </a:ext>
             </a:extLst>
           </p:cNvPr>
@@ -1427,7 +1427,7 @@
           <p:cNvPr id="9" name="header-summary">
             <a:extLst xmlns:a="http://schemas.openxmlformats.org/drawingml/2006/main">
               <a:ext uri="{FF2B5EF4-FFF2-40B4-BE49-F238E27FC236}">
-                <a16:creationId xmlns:a16="http://schemas.microsoft.com/office/drawing/2014/main" id="{228DAD8C-6ED1-456C-8D61-B0BD0EC77415}"/>
+                <a16:creationId xmlns:a16="http://schemas.microsoft.com/office/drawing/2014/main" id="{6C99F9AB-FBB5-4358-85BF-9E3F6D6903BA}"/>
               </a:ext>
             </a:extLst>
           </p:cNvPr>
@@ -1460,7 +1460,7 @@
           <p:cNvPr id="10" name="header-metric-1-value">
             <a:extLst xmlns:a="http://schemas.openxmlformats.org/drawingml/2006/main">
               <a:ext uri="{FF2B5EF4-FFF2-40B4-BE49-F238E27FC236}">
-                <a16:creationId xmlns:a16="http://schemas.microsoft.com/office/drawing/2014/main" id="{251EEA75-310A-4479-B6A6-E3ACDCD9532A}"/>
+                <a16:creationId xmlns:a16="http://schemas.microsoft.com/office/drawing/2014/main" id="{CDB0B2C1-C38B-4137-8993-5CF8A9F96635}"/>
               </a:ext>
             </a:extLst>
           </p:cNvPr>
@@ -1510,7 +1510,7 @@
           <p:cNvPr id="11" name="header-metric-1-label">
             <a:extLst xmlns:a="http://schemas.openxmlformats.org/drawingml/2006/main">
               <a:ext uri="{FF2B5EF4-FFF2-40B4-BE49-F238E27FC236}">
-                <a16:creationId xmlns:a16="http://schemas.microsoft.com/office/drawing/2014/main" id="{E395B90A-9C75-4179-A0BD-656D3BEA7B14}"/>
+                <a16:creationId xmlns:a16="http://schemas.microsoft.com/office/drawing/2014/main" id="{CE65A49C-C78F-46B1-96E1-9F93377E8D5D}"/>
               </a:ext>
             </a:extLst>
           </p:cNvPr>
@@ -1560,7 +1560,7 @@
           <p:cNvPr id="12" name="header-metric-2-value">
             <a:extLst xmlns:a="http://schemas.openxmlformats.org/drawingml/2006/main">
               <a:ext uri="{FF2B5EF4-FFF2-40B4-BE49-F238E27FC236}">
-                <a16:creationId xmlns:a16="http://schemas.microsoft.com/office/drawing/2014/main" id="{6FB32B3B-CD16-4B5E-A323-1E26BE3A81B0}"/>
+                <a16:creationId xmlns:a16="http://schemas.microsoft.com/office/drawing/2014/main" id="{F2C97EE0-7C11-435F-B54C-43779FC7402B}"/>
               </a:ext>
             </a:extLst>
           </p:cNvPr>
@@ -1610,7 +1610,7 @@
           <p:cNvPr id="13" name="header-metric-2-label">
             <a:extLst xmlns:a="http://schemas.openxmlformats.org/drawingml/2006/main">
               <a:ext uri="{FF2B5EF4-FFF2-40B4-BE49-F238E27FC236}">
-                <a16:creationId xmlns:a16="http://schemas.microsoft.com/office/drawing/2014/main" id="{3ABFECB5-D6C1-446C-9BC7-EF764AD399CC}"/>
+                <a16:creationId xmlns:a16="http://schemas.microsoft.com/office/drawing/2014/main" id="{461259CE-5828-48A8-9A97-32860A044220}"/>
               </a:ext>
             </a:extLst>
           </p:cNvPr>
@@ -1660,7 +1660,7 @@
           <p:cNvPr id="14" name="header-metric-3-value">
             <a:extLst xmlns:a="http://schemas.openxmlformats.org/drawingml/2006/main">
               <a:ext uri="{FF2B5EF4-FFF2-40B4-BE49-F238E27FC236}">
-                <a16:creationId xmlns:a16="http://schemas.microsoft.com/office/drawing/2014/main" id="{7567AC24-C31F-45F5-BF55-195C7C652496}"/>
+                <a16:creationId xmlns:a16="http://schemas.microsoft.com/office/drawing/2014/main" id="{8CAB5F4C-D3F4-406F-9545-F80119660E71}"/>
               </a:ext>
             </a:extLst>
           </p:cNvPr>
@@ -1710,7 +1710,7 @@
           <p:cNvPr id="15" name="header-metric-3-label">
             <a:extLst xmlns:a="http://schemas.openxmlformats.org/drawingml/2006/main">
               <a:ext uri="{FF2B5EF4-FFF2-40B4-BE49-F238E27FC236}">
-                <a16:creationId xmlns:a16="http://schemas.microsoft.com/office/drawing/2014/main" id="{4D8BC862-82B7-4053-9044-3E2BC295D702}"/>
+                <a16:creationId xmlns:a16="http://schemas.microsoft.com/office/drawing/2014/main" id="{DA7F388E-E1E0-4DF3-B090-EBCCBDEB3ADE}"/>
               </a:ext>
             </a:extLst>
           </p:cNvPr>
@@ -1760,7 +1760,7 @@
           <p:cNvPr id="16" name="question-title">
             <a:extLst xmlns:a="http://schemas.openxmlformats.org/drawingml/2006/main">
               <a:ext uri="{FF2B5EF4-FFF2-40B4-BE49-F238E27FC236}">
-                <a16:creationId xmlns:a16="http://schemas.microsoft.com/office/drawing/2014/main" id="{63178609-00F9-498D-A608-E98044993970}"/>
+                <a16:creationId xmlns:a16="http://schemas.microsoft.com/office/drawing/2014/main" id="{3F18D7DA-73B0-4150-BC5B-3582DFBB1A8C}"/>
               </a:ext>
             </a:extLst>
           </p:cNvPr>
@@ -1810,7 +1810,7 @@
           <p:cNvPr id="17" name="question-rule">
             <a:extLst xmlns:a="http://schemas.openxmlformats.org/drawingml/2006/main">
               <a:ext uri="{FF2B5EF4-FFF2-40B4-BE49-F238E27FC236}">
-                <a16:creationId xmlns:a16="http://schemas.microsoft.com/office/drawing/2014/main" id="{D904F198-44B3-480B-83FC-BABD7E61ABC8}"/>
+                <a16:creationId xmlns:a16="http://schemas.microsoft.com/office/drawing/2014/main" id="{0FADE3B0-13D7-49E8-8D3A-88477660A25A}"/>
               </a:ext>
             </a:extLst>
           </p:cNvPr>
@@ -1843,7 +1843,7 @@
           <p:cNvPr id="18" name="research-question">
             <a:extLst xmlns:a="http://schemas.openxmlformats.org/drawingml/2006/main">
               <a:ext uri="{FF2B5EF4-FFF2-40B4-BE49-F238E27FC236}">
-                <a16:creationId xmlns:a16="http://schemas.microsoft.com/office/drawing/2014/main" id="{1F424401-9CCD-457A-B508-374B15586477}"/>
+                <a16:creationId xmlns:a16="http://schemas.microsoft.com/office/drawing/2014/main" id="{6E3B851E-017A-477B-B65F-34FEA09C8BEE}"/>
               </a:ext>
             </a:extLst>
           </p:cNvPr>
@@ -1893,7 +1893,7 @@
           <p:cNvPr id="19" name="question-evidence">
             <a:extLst xmlns:a="http://schemas.openxmlformats.org/drawingml/2006/main">
               <a:ext uri="{FF2B5EF4-FFF2-40B4-BE49-F238E27FC236}">
-                <a16:creationId xmlns:a16="http://schemas.microsoft.com/office/drawing/2014/main" id="{204CDC0B-7174-44AB-A18C-D88C23A6CD12}"/>
+                <a16:creationId xmlns:a16="http://schemas.microsoft.com/office/drawing/2014/main" id="{D1CCE178-8CFA-402B-ADA8-A3180C4DD38B}"/>
               </a:ext>
             </a:extLst>
           </p:cNvPr>
@@ -1943,7 +1943,7 @@
           <p:cNvPr id="20" name="pipeline-title">
             <a:extLst xmlns:a="http://schemas.openxmlformats.org/drawingml/2006/main">
               <a:ext uri="{FF2B5EF4-FFF2-40B4-BE49-F238E27FC236}">
-                <a16:creationId xmlns:a16="http://schemas.microsoft.com/office/drawing/2014/main" id="{ECE30827-8F25-4E66-A071-0669C1333DE8}"/>
+                <a16:creationId xmlns:a16="http://schemas.microsoft.com/office/drawing/2014/main" id="{1F8F255C-0CB0-48D2-808D-F9991D4964BB}"/>
               </a:ext>
             </a:extLst>
           </p:cNvPr>
@@ -1993,7 +1993,7 @@
           <p:cNvPr id="21" name="pipeline-rule">
             <a:extLst xmlns:a="http://schemas.openxmlformats.org/drawingml/2006/main">
               <a:ext uri="{FF2B5EF4-FFF2-40B4-BE49-F238E27FC236}">
-                <a16:creationId xmlns:a16="http://schemas.microsoft.com/office/drawing/2014/main" id="{BBB852D3-16A8-4D9D-95AF-8CE19148CA60}"/>
+                <a16:creationId xmlns:a16="http://schemas.microsoft.com/office/drawing/2014/main" id="{389D688D-7854-411F-B77A-E1E95E31D07C}"/>
               </a:ext>
             </a:extLst>
           </p:cNvPr>
@@ -2026,7 +2026,7 @@
           <p:cNvPr id="22" name="pipeline-1-number-bg">
             <a:extLst xmlns:a="http://schemas.openxmlformats.org/drawingml/2006/main">
               <a:ext uri="{FF2B5EF4-FFF2-40B4-BE49-F238E27FC236}">
-                <a16:creationId xmlns:a16="http://schemas.microsoft.com/office/drawing/2014/main" id="{CB9AA189-0178-41E0-9989-6A49BB0C673B}"/>
+                <a16:creationId xmlns:a16="http://schemas.microsoft.com/office/drawing/2014/main" id="{2A6AD321-E653-400E-9E53-ECB9474C286F}"/>
               </a:ext>
             </a:extLst>
           </p:cNvPr>
@@ -2059,7 +2059,7 @@
           <p:cNvPr id="23" name="pipeline-1-number">
             <a:extLst xmlns:a="http://schemas.openxmlformats.org/drawingml/2006/main">
               <a:ext uri="{FF2B5EF4-FFF2-40B4-BE49-F238E27FC236}">
-                <a16:creationId xmlns:a16="http://schemas.microsoft.com/office/drawing/2014/main" id="{4FE6A7DD-CEED-4DB5-BCEA-5F6CA29DC4BD}"/>
+                <a16:creationId xmlns:a16="http://schemas.microsoft.com/office/drawing/2014/main" id="{88FBB8E8-DF0B-4EFF-8225-9AE26E2345F4}"/>
               </a:ext>
             </a:extLst>
           </p:cNvPr>
@@ -2109,7 +2109,7 @@
           <p:cNvPr id="24" name="pipeline-1-text">
             <a:extLst xmlns:a="http://schemas.openxmlformats.org/drawingml/2006/main">
               <a:ext uri="{FF2B5EF4-FFF2-40B4-BE49-F238E27FC236}">
-                <a16:creationId xmlns:a16="http://schemas.microsoft.com/office/drawing/2014/main" id="{3C52EB12-50D0-4CB2-ACFE-AC45BB395832}"/>
+                <a16:creationId xmlns:a16="http://schemas.microsoft.com/office/drawing/2014/main" id="{DE590DF1-4503-40AD-B02D-75A0C71C4293}"/>
               </a:ext>
             </a:extLst>
           </p:cNvPr>
@@ -2159,7 +2159,7 @@
           <p:cNvPr id="25" name="pipeline-2-number-bg">
             <a:extLst xmlns:a="http://schemas.openxmlformats.org/drawingml/2006/main">
               <a:ext uri="{FF2B5EF4-FFF2-40B4-BE49-F238E27FC236}">
-                <a16:creationId xmlns:a16="http://schemas.microsoft.com/office/drawing/2014/main" id="{681ECF23-D331-455A-BC46-9DACFFFF9E87}"/>
+                <a16:creationId xmlns:a16="http://schemas.microsoft.com/office/drawing/2014/main" id="{C7698172-AC9F-41AE-96F8-E95809C4635B}"/>
               </a:ext>
             </a:extLst>
           </p:cNvPr>
@@ -2192,7 +2192,7 @@
           <p:cNvPr id="26" name="pipeline-2-number">
             <a:extLst xmlns:a="http://schemas.openxmlformats.org/drawingml/2006/main">
               <a:ext uri="{FF2B5EF4-FFF2-40B4-BE49-F238E27FC236}">
-                <a16:creationId xmlns:a16="http://schemas.microsoft.com/office/drawing/2014/main" id="{C60DE340-33C2-40F0-85E7-2F08443FE6BB}"/>
+                <a16:creationId xmlns:a16="http://schemas.microsoft.com/office/drawing/2014/main" id="{B7777E6D-49E4-436F-AA1D-DA37220C8219}"/>
               </a:ext>
             </a:extLst>
           </p:cNvPr>
@@ -2242,7 +2242,7 @@
           <p:cNvPr id="27" name="pipeline-2-text">
             <a:extLst xmlns:a="http://schemas.openxmlformats.org/drawingml/2006/main">
               <a:ext uri="{FF2B5EF4-FFF2-40B4-BE49-F238E27FC236}">
-                <a16:creationId xmlns:a16="http://schemas.microsoft.com/office/drawing/2014/main" id="{BE6DD611-63D0-4B1E-B7AF-E0D08A3CDDCD}"/>
+                <a16:creationId xmlns:a16="http://schemas.microsoft.com/office/drawing/2014/main" id="{9F9BABA6-45F3-4F7F-A179-C2D485571723}"/>
               </a:ext>
             </a:extLst>
           </p:cNvPr>
@@ -2292,7 +2292,7 @@
           <p:cNvPr id="28" name="pipeline-3-number-bg">
             <a:extLst xmlns:a="http://schemas.openxmlformats.org/drawingml/2006/main">
               <a:ext uri="{FF2B5EF4-FFF2-40B4-BE49-F238E27FC236}">
-                <a16:creationId xmlns:a16="http://schemas.microsoft.com/office/drawing/2014/main" id="{4664FF4B-01C0-468F-BAA0-5F814104D351}"/>
+                <a16:creationId xmlns:a16="http://schemas.microsoft.com/office/drawing/2014/main" id="{CE0A8493-9FB3-4080-B2BA-C98A1A9EFCE2}"/>
               </a:ext>
             </a:extLst>
           </p:cNvPr>
@@ -2325,7 +2325,7 @@
           <p:cNvPr id="29" name="pipeline-3-number">
             <a:extLst xmlns:a="http://schemas.openxmlformats.org/drawingml/2006/main">
               <a:ext uri="{FF2B5EF4-FFF2-40B4-BE49-F238E27FC236}">
-                <a16:creationId xmlns:a16="http://schemas.microsoft.com/office/drawing/2014/main" id="{3C1258A3-980F-41B2-A30A-D4589851B8FE}"/>
+                <a16:creationId xmlns:a16="http://schemas.microsoft.com/office/drawing/2014/main" id="{30210101-4718-4AFA-85A8-E03D974C6929}"/>
               </a:ext>
             </a:extLst>
           </p:cNvPr>
@@ -2375,7 +2375,7 @@
           <p:cNvPr id="30" name="pipeline-3-text">
             <a:extLst xmlns:a="http://schemas.openxmlformats.org/drawingml/2006/main">
               <a:ext uri="{FF2B5EF4-FFF2-40B4-BE49-F238E27FC236}">
-                <a16:creationId xmlns:a16="http://schemas.microsoft.com/office/drawing/2014/main" id="{537A103B-CB44-4EA6-B1A0-DE5767EEBD3A}"/>
+                <a16:creationId xmlns:a16="http://schemas.microsoft.com/office/drawing/2014/main" id="{51A23ABD-9FB5-447D-882A-73E4AA2A9993}"/>
               </a:ext>
             </a:extLst>
           </p:cNvPr>
@@ -2425,7 +2425,7 @@
           <p:cNvPr id="31" name="pipeline-4-number-bg">
             <a:extLst xmlns:a="http://schemas.openxmlformats.org/drawingml/2006/main">
               <a:ext uri="{FF2B5EF4-FFF2-40B4-BE49-F238E27FC236}">
-                <a16:creationId xmlns:a16="http://schemas.microsoft.com/office/drawing/2014/main" id="{ACB2CD1D-5CBC-4F6A-827B-D403EC97EF17}"/>
+                <a16:creationId xmlns:a16="http://schemas.microsoft.com/office/drawing/2014/main" id="{38D2486F-58BE-4B33-AA78-2BB507545CF5}"/>
               </a:ext>
             </a:extLst>
           </p:cNvPr>
@@ -2458,7 +2458,7 @@
           <p:cNvPr id="32" name="pipeline-4-number">
             <a:extLst xmlns:a="http://schemas.openxmlformats.org/drawingml/2006/main">
               <a:ext uri="{FF2B5EF4-FFF2-40B4-BE49-F238E27FC236}">
-                <a16:creationId xmlns:a16="http://schemas.microsoft.com/office/drawing/2014/main" id="{607CDF24-52C0-49FA-B854-2D766F549971}"/>
+                <a16:creationId xmlns:a16="http://schemas.microsoft.com/office/drawing/2014/main" id="{6834C152-EBE8-474A-8FCC-ACA5025853EB}"/>
               </a:ext>
             </a:extLst>
           </p:cNvPr>
@@ -2508,7 +2508,7 @@
           <p:cNvPr id="33" name="pipeline-4-text">
             <a:extLst xmlns:a="http://schemas.openxmlformats.org/drawingml/2006/main">
               <a:ext uri="{FF2B5EF4-FFF2-40B4-BE49-F238E27FC236}">
-                <a16:creationId xmlns:a16="http://schemas.microsoft.com/office/drawing/2014/main" id="{21279A19-4CB0-401D-A962-90619F272866}"/>
+                <a16:creationId xmlns:a16="http://schemas.microsoft.com/office/drawing/2014/main" id="{408A502C-6170-41BD-9112-8D9B6EBDE467}"/>
               </a:ext>
             </a:extLst>
           </p:cNvPr>
@@ -2558,7 +2558,7 @@
           <p:cNvPr id="34" name="dataset-panel">
             <a:extLst xmlns:a="http://schemas.openxmlformats.org/drawingml/2006/main">
               <a:ext uri="{FF2B5EF4-FFF2-40B4-BE49-F238E27FC236}">
-                <a16:creationId xmlns:a16="http://schemas.microsoft.com/office/drawing/2014/main" id="{C734AFF6-B713-4965-B169-34AD61F64C81}"/>
+                <a16:creationId xmlns:a16="http://schemas.microsoft.com/office/drawing/2014/main" id="{696DC141-0E7D-43B2-BFC8-3D9C308F567B}"/>
               </a:ext>
             </a:extLst>
           </p:cNvPr>
@@ -2593,7 +2593,7 @@
           <p:cNvPr id="35" name="dataset-kicker">
             <a:extLst xmlns:a="http://schemas.openxmlformats.org/drawingml/2006/main">
               <a:ext uri="{FF2B5EF4-FFF2-40B4-BE49-F238E27FC236}">
-                <a16:creationId xmlns:a16="http://schemas.microsoft.com/office/drawing/2014/main" id="{D716D160-D4B2-4D1B-907A-25A1DA95FFCB}"/>
+                <a16:creationId xmlns:a16="http://schemas.microsoft.com/office/drawing/2014/main" id="{12F306D0-C151-4A59-9752-181088D363C1}"/>
               </a:ext>
             </a:extLst>
           </p:cNvPr>
@@ -2643,7 +2643,7 @@
           <p:cNvPr id="36" name="datasets">
             <a:extLst xmlns:a="http://schemas.openxmlformats.org/drawingml/2006/main">
               <a:ext uri="{FF2B5EF4-FFF2-40B4-BE49-F238E27FC236}">
-                <a16:creationId xmlns:a16="http://schemas.microsoft.com/office/drawing/2014/main" id="{D59D8856-4988-4517-ACEE-6FC04CCE953F}"/>
+                <a16:creationId xmlns:a16="http://schemas.microsoft.com/office/drawing/2014/main" id="{403F9CAA-7FAC-4B0C-A89C-4DB995C6CC5C}"/>
               </a:ext>
             </a:extLst>
           </p:cNvPr>
@@ -2744,7 +2744,7 @@
           <p:cNvPr id="37" name="dataset-evidence">
             <a:extLst xmlns:a="http://schemas.openxmlformats.org/drawingml/2006/main">
               <a:ext uri="{FF2B5EF4-FFF2-40B4-BE49-F238E27FC236}">
-                <a16:creationId xmlns:a16="http://schemas.microsoft.com/office/drawing/2014/main" id="{5A3AB93C-BA2E-4F23-B583-9D58EF7F140E}"/>
+                <a16:creationId xmlns:a16="http://schemas.microsoft.com/office/drawing/2014/main" id="{C2C0A812-99CC-496E-A127-174681BA2812}"/>
               </a:ext>
             </a:extLst>
           </p:cNvPr>
@@ -2794,7 +2794,7 @@
           <p:cNvPr id="38" name="figure-one-heading-title">
             <a:extLst xmlns:a="http://schemas.openxmlformats.org/drawingml/2006/main">
               <a:ext uri="{FF2B5EF4-FFF2-40B4-BE49-F238E27FC236}">
-                <a16:creationId xmlns:a16="http://schemas.microsoft.com/office/drawing/2014/main" id="{3F5A4EF8-6A19-4E8F-8C22-A00B58D299B3}"/>
+                <a16:creationId xmlns:a16="http://schemas.microsoft.com/office/drawing/2014/main" id="{33836ED2-D418-4288-A4A8-FBFF7C7303CD}"/>
               </a:ext>
             </a:extLst>
           </p:cNvPr>
@@ -2844,7 +2844,7 @@
           <p:cNvPr id="39" name="figure-one-heading-rule">
             <a:extLst xmlns:a="http://schemas.openxmlformats.org/drawingml/2006/main">
               <a:ext uri="{FF2B5EF4-FFF2-40B4-BE49-F238E27FC236}">
-                <a16:creationId xmlns:a16="http://schemas.microsoft.com/office/drawing/2014/main" id="{7B75177A-C31C-4EA8-A9BB-59E8E3701FEE}"/>
+                <a16:creationId xmlns:a16="http://schemas.microsoft.com/office/drawing/2014/main" id="{7BA43B6F-AC6E-4168-A06E-2520FC0D34AB}"/>
               </a:ext>
             </a:extLst>
           </p:cNvPr>
@@ -2877,7 +2877,7 @@
           <p:cNvPr id="40" name="figure-one-frame">
             <a:extLst xmlns:a="http://schemas.openxmlformats.org/drawingml/2006/main">
               <a:ext uri="{FF2B5EF4-FFF2-40B4-BE49-F238E27FC236}">
-                <a16:creationId xmlns:a16="http://schemas.microsoft.com/office/drawing/2014/main" id="{E45BB8B7-7F2C-455A-96F8-01E643E8AE60}"/>
+                <a16:creationId xmlns:a16="http://schemas.microsoft.com/office/drawing/2014/main" id="{607242FC-1CC8-4DE4-A696-C5DBC0CE05B1}"/>
               </a:ext>
             </a:extLst>
           </p:cNvPr>
@@ -2912,7 +2912,7 @@
           <p:cNvPr id="41" name="figure-one-placeholder">
             <a:extLst xmlns:a="http://schemas.openxmlformats.org/drawingml/2006/main">
               <a:ext uri="{FF2B5EF4-FFF2-40B4-BE49-F238E27FC236}">
-                <a16:creationId xmlns:a16="http://schemas.microsoft.com/office/drawing/2014/main" id="{EBEE2881-9654-4D99-A2B4-AA55E04244DF}"/>
+                <a16:creationId xmlns:a16="http://schemas.microsoft.com/office/drawing/2014/main" id="{D0550CC6-D831-4A77-B7B3-579A02584BEC}"/>
               </a:ext>
             </a:extLst>
           </p:cNvPr>
@@ -2947,7 +2947,7 @@
           <p:cNvPr id="42" name="figure-one-placeholder-label">
             <a:extLst xmlns:a="http://schemas.openxmlformats.org/drawingml/2006/main">
               <a:ext uri="{FF2B5EF4-FFF2-40B4-BE49-F238E27FC236}">
-                <a16:creationId xmlns:a16="http://schemas.microsoft.com/office/drawing/2014/main" id="{7ABC4741-BE3D-4F75-A528-5EB0C2FD8EA9}"/>
+                <a16:creationId xmlns:a16="http://schemas.microsoft.com/office/drawing/2014/main" id="{8D9DE2DD-F497-4594-A549-11B37FB4E49B}"/>
               </a:ext>
             </a:extLst>
           </p:cNvPr>
@@ -2997,7 +2997,7 @@
           <p:cNvPr id="43" name="figure-one-caption">
             <a:extLst xmlns:a="http://schemas.openxmlformats.org/drawingml/2006/main">
               <a:ext uri="{FF2B5EF4-FFF2-40B4-BE49-F238E27FC236}">
-                <a16:creationId xmlns:a16="http://schemas.microsoft.com/office/drawing/2014/main" id="{EE1826E6-3C83-4B65-9B1C-BFACF46C1FAA}"/>
+                <a16:creationId xmlns:a16="http://schemas.microsoft.com/office/drawing/2014/main" id="{0A261FEE-9041-486A-8834-0EF8BE39AE90}"/>
               </a:ext>
             </a:extLst>
           </p:cNvPr>
@@ -3047,7 +3047,7 @@
           <p:cNvPr id="44" name="figure-one-source">
             <a:extLst xmlns:a="http://schemas.openxmlformats.org/drawingml/2006/main">
               <a:ext uri="{FF2B5EF4-FFF2-40B4-BE49-F238E27FC236}">
-                <a16:creationId xmlns:a16="http://schemas.microsoft.com/office/drawing/2014/main" id="{EFF19D39-3D94-46D2-AD64-BE0B38773440}"/>
+                <a16:creationId xmlns:a16="http://schemas.microsoft.com/office/drawing/2014/main" id="{55D96D85-7CB4-429F-AE46-71A443422178}"/>
               </a:ext>
             </a:extLst>
           </p:cNvPr>
@@ -3097,7 +3097,7 @@
           <p:cNvPr id="45" name="central-takeaway">
             <a:extLst xmlns:a="http://schemas.openxmlformats.org/drawingml/2006/main">
               <a:ext uri="{FF2B5EF4-FFF2-40B4-BE49-F238E27FC236}">
-                <a16:creationId xmlns:a16="http://schemas.microsoft.com/office/drawing/2014/main" id="{BEEC5CB2-37DE-433C-81A5-A5B4C95B5FD2}"/>
+                <a16:creationId xmlns:a16="http://schemas.microsoft.com/office/drawing/2014/main" id="{B98D031B-A350-46F9-ADE4-3D5BAB94CEA2}"/>
               </a:ext>
             </a:extLst>
           </p:cNvPr>
@@ -3130,7 +3130,7 @@
           <p:cNvPr id="46" name="central-takeaway-title">
             <a:extLst xmlns:a="http://schemas.openxmlformats.org/drawingml/2006/main">
               <a:ext uri="{FF2B5EF4-FFF2-40B4-BE49-F238E27FC236}">
-                <a16:creationId xmlns:a16="http://schemas.microsoft.com/office/drawing/2014/main" id="{FD67A4A7-5499-486E-A359-2E6846BD3B72}"/>
+                <a16:creationId xmlns:a16="http://schemas.microsoft.com/office/drawing/2014/main" id="{4F809D32-4329-4963-96CA-3CBBD1C9FD5F}"/>
               </a:ext>
             </a:extLst>
           </p:cNvPr>
@@ -3180,7 +3180,7 @@
           <p:cNvPr id="47" name="central-takeaway-subtitle">
             <a:extLst xmlns:a="http://schemas.openxmlformats.org/drawingml/2006/main">
               <a:ext uri="{FF2B5EF4-FFF2-40B4-BE49-F238E27FC236}">
-                <a16:creationId xmlns:a16="http://schemas.microsoft.com/office/drawing/2014/main" id="{D0B933ED-90A7-41AB-BCB9-066ABA34F619}"/>
+                <a16:creationId xmlns:a16="http://schemas.microsoft.com/office/drawing/2014/main" id="{F8E700A3-C293-469D-9779-F55FABD15516}"/>
               </a:ext>
             </a:extLst>
           </p:cNvPr>
@@ -3230,7 +3230,7 @@
           <p:cNvPr id="48" name="takeaway-evidence">
             <a:extLst xmlns:a="http://schemas.openxmlformats.org/drawingml/2006/main">
               <a:ext uri="{FF2B5EF4-FFF2-40B4-BE49-F238E27FC236}">
-                <a16:creationId xmlns:a16="http://schemas.microsoft.com/office/drawing/2014/main" id="{6589D16B-10B5-4251-B97C-2110BE6E5D2B}"/>
+                <a16:creationId xmlns:a16="http://schemas.microsoft.com/office/drawing/2014/main" id="{5C34590A-4D63-4F2B-82E8-F71E5476D2AA}"/>
               </a:ext>
             </a:extLst>
           </p:cNvPr>
@@ -3280,7 +3280,7 @@
           <p:cNvPr id="49" name="figure-two-heading-title">
             <a:extLst xmlns:a="http://schemas.openxmlformats.org/drawingml/2006/main">
               <a:ext uri="{FF2B5EF4-FFF2-40B4-BE49-F238E27FC236}">
-                <a16:creationId xmlns:a16="http://schemas.microsoft.com/office/drawing/2014/main" id="{D1D12EDA-59FA-46B2-A7AB-778E6FABF383}"/>
+                <a16:creationId xmlns:a16="http://schemas.microsoft.com/office/drawing/2014/main" id="{E3FB0AAE-2546-41F5-A94E-EFBBBD256F81}"/>
               </a:ext>
             </a:extLst>
           </p:cNvPr>
@@ -3330,7 +3330,7 @@
           <p:cNvPr id="50" name="figure-two-heading-rule">
             <a:extLst xmlns:a="http://schemas.openxmlformats.org/drawingml/2006/main">
               <a:ext uri="{FF2B5EF4-FFF2-40B4-BE49-F238E27FC236}">
-                <a16:creationId xmlns:a16="http://schemas.microsoft.com/office/drawing/2014/main" id="{1EADDCFF-F289-4E68-96B1-D07AA137D99E}"/>
+                <a16:creationId xmlns:a16="http://schemas.microsoft.com/office/drawing/2014/main" id="{D1E9138F-1050-4061-97E7-370AAEE00BD8}"/>
               </a:ext>
             </a:extLst>
           </p:cNvPr>
@@ -3363,7 +3363,7 @@
           <p:cNvPr id="51" name="figure-two-frame">
             <a:extLst xmlns:a="http://schemas.openxmlformats.org/drawingml/2006/main">
               <a:ext uri="{FF2B5EF4-FFF2-40B4-BE49-F238E27FC236}">
-                <a16:creationId xmlns:a16="http://schemas.microsoft.com/office/drawing/2014/main" id="{F1A7E457-B8E2-400D-9E2B-3F7536FF9F67}"/>
+                <a16:creationId xmlns:a16="http://schemas.microsoft.com/office/drawing/2014/main" id="{ECE7AC57-B712-40BD-B88E-7D6A1D68DC6F}"/>
               </a:ext>
             </a:extLst>
           </p:cNvPr>
@@ -3398,7 +3398,7 @@
           <p:cNvPr id="52" name="figure-two-placeholder">
             <a:extLst xmlns:a="http://schemas.openxmlformats.org/drawingml/2006/main">
               <a:ext uri="{FF2B5EF4-FFF2-40B4-BE49-F238E27FC236}">
-                <a16:creationId xmlns:a16="http://schemas.microsoft.com/office/drawing/2014/main" id="{B72A6088-3C1D-4161-83D5-D1BFA28FCC15}"/>
+                <a16:creationId xmlns:a16="http://schemas.microsoft.com/office/drawing/2014/main" id="{F53F2704-0C77-468E-AEA3-0771A110C239}"/>
               </a:ext>
             </a:extLst>
           </p:cNvPr>
@@ -3433,7 +3433,7 @@
           <p:cNvPr id="53" name="figure-two-placeholder-label">
             <a:extLst xmlns:a="http://schemas.openxmlformats.org/drawingml/2006/main">
               <a:ext uri="{FF2B5EF4-FFF2-40B4-BE49-F238E27FC236}">
-                <a16:creationId xmlns:a16="http://schemas.microsoft.com/office/drawing/2014/main" id="{1A672A10-E066-46C9-BA35-0D17784F3E7C}"/>
+                <a16:creationId xmlns:a16="http://schemas.microsoft.com/office/drawing/2014/main" id="{746ADBEA-7BA8-4BA5-803F-192DB4DCCA34}"/>
               </a:ext>
             </a:extLst>
           </p:cNvPr>
@@ -3483,7 +3483,7 @@
           <p:cNvPr id="54" name="figure-two-caption">
             <a:extLst xmlns:a="http://schemas.openxmlformats.org/drawingml/2006/main">
               <a:ext uri="{FF2B5EF4-FFF2-40B4-BE49-F238E27FC236}">
-                <a16:creationId xmlns:a16="http://schemas.microsoft.com/office/drawing/2014/main" id="{965BF7C4-B401-4133-8769-6E68AA50B3B0}"/>
+                <a16:creationId xmlns:a16="http://schemas.microsoft.com/office/drawing/2014/main" id="{5FD91206-AECE-42B5-8B9B-2242B8DEF110}"/>
               </a:ext>
             </a:extLst>
           </p:cNvPr>
@@ -3533,7 +3533,7 @@
           <p:cNvPr id="55" name="figure-two-source">
             <a:extLst xmlns:a="http://schemas.openxmlformats.org/drawingml/2006/main">
               <a:ext uri="{FF2B5EF4-FFF2-40B4-BE49-F238E27FC236}">
-                <a16:creationId xmlns:a16="http://schemas.microsoft.com/office/drawing/2014/main" id="{ACB95409-98D0-41C1-BB12-2C72CE253F52}"/>
+                <a16:creationId xmlns:a16="http://schemas.microsoft.com/office/drawing/2014/main" id="{1C4FBD9E-9343-44FB-AA72-C9CDCA1A9A06}"/>
               </a:ext>
             </a:extLst>
           </p:cNvPr>
@@ -3583,7 +3583,7 @@
           <p:cNvPr id="56" name="validation-heading-title">
             <a:extLst xmlns:a="http://schemas.openxmlformats.org/drawingml/2006/main">
               <a:ext uri="{FF2B5EF4-FFF2-40B4-BE49-F238E27FC236}">
-                <a16:creationId xmlns:a16="http://schemas.microsoft.com/office/drawing/2014/main" id="{525BE116-76BA-40A2-8AD7-DA727DC6B924}"/>
+                <a16:creationId xmlns:a16="http://schemas.microsoft.com/office/drawing/2014/main" id="{15B290E7-F0C4-4AE6-80A8-E2621BE73890}"/>
               </a:ext>
             </a:extLst>
           </p:cNvPr>
@@ -3633,7 +3633,7 @@
           <p:cNvPr id="57" name="validation-heading-rule">
             <a:extLst xmlns:a="http://schemas.openxmlformats.org/drawingml/2006/main">
               <a:ext uri="{FF2B5EF4-FFF2-40B4-BE49-F238E27FC236}">
-                <a16:creationId xmlns:a16="http://schemas.microsoft.com/office/drawing/2014/main" id="{169DBBA0-514F-4B92-A551-2EE07861FC64}"/>
+                <a16:creationId xmlns:a16="http://schemas.microsoft.com/office/drawing/2014/main" id="{4E3A2A27-0999-47CD-9A26-22EB34A34D17}"/>
               </a:ext>
             </a:extLst>
           </p:cNvPr>
@@ -3666,7 +3666,7 @@
           <p:cNvPr id="58" name="validation-panel">
             <a:extLst xmlns:a="http://schemas.openxmlformats.org/drawingml/2006/main">
               <a:ext uri="{FF2B5EF4-FFF2-40B4-BE49-F238E27FC236}">
-                <a16:creationId xmlns:a16="http://schemas.microsoft.com/office/drawing/2014/main" id="{3DEA8DAF-0E12-4CF0-ACA0-0FC79B94631F}"/>
+                <a16:creationId xmlns:a16="http://schemas.microsoft.com/office/drawing/2014/main" id="{65F852C5-5526-4F9E-B1A3-0AF3C987914F}"/>
               </a:ext>
             </a:extLst>
           </p:cNvPr>
@@ -3701,7 +3701,7 @@
           <p:cNvPr id="59" name="validation">
             <a:extLst xmlns:a="http://schemas.openxmlformats.org/drawingml/2006/main">
               <a:ext uri="{FF2B5EF4-FFF2-40B4-BE49-F238E27FC236}">
-                <a16:creationId xmlns:a16="http://schemas.microsoft.com/office/drawing/2014/main" id="{0BC1A000-7C27-4DB1-8466-57DA74D0C7E9}"/>
+                <a16:creationId xmlns:a16="http://schemas.microsoft.com/office/drawing/2014/main" id="{852A81A2-0658-4024-B925-52D9139DA9D4}"/>
               </a:ext>
             </a:extLst>
           </p:cNvPr>
@@ -3785,7 +3785,7 @@
           <p:cNvPr id="60" name="validation-evidence">
             <a:extLst xmlns:a="http://schemas.openxmlformats.org/drawingml/2006/main">
               <a:ext uri="{FF2B5EF4-FFF2-40B4-BE49-F238E27FC236}">
-                <a16:creationId xmlns:a16="http://schemas.microsoft.com/office/drawing/2014/main" id="{4E8515FA-F070-4EFF-BBEA-B5FBE8ABFA21}"/>
+                <a16:creationId xmlns:a16="http://schemas.microsoft.com/office/drawing/2014/main" id="{536D50B0-7A43-45A8-A4F9-2DC771F68F11}"/>
               </a:ext>
             </a:extLst>
           </p:cNvPr>
@@ -3835,7 +3835,7 @@
           <p:cNvPr id="61" name="performance-strip">
             <a:extLst xmlns:a="http://schemas.openxmlformats.org/drawingml/2006/main">
               <a:ext uri="{FF2B5EF4-FFF2-40B4-BE49-F238E27FC236}">
-                <a16:creationId xmlns:a16="http://schemas.microsoft.com/office/drawing/2014/main" id="{F6330F42-8964-46D5-9001-93F9F0D15BDE}"/>
+                <a16:creationId xmlns:a16="http://schemas.microsoft.com/office/drawing/2014/main" id="{EE046299-5286-44F2-AF1A-39069991FA85}"/>
               </a:ext>
             </a:extLst>
           </p:cNvPr>
@@ -3868,7 +3868,7 @@
           <p:cNvPr id="62" name="performance-strip-text">
             <a:extLst xmlns:a="http://schemas.openxmlformats.org/drawingml/2006/main">
               <a:ext uri="{FF2B5EF4-FFF2-40B4-BE49-F238E27FC236}">
-                <a16:creationId xmlns:a16="http://schemas.microsoft.com/office/drawing/2014/main" id="{75EFD1C8-B353-4457-B02C-51FE5AB6A090}"/>
+                <a16:creationId xmlns:a16="http://schemas.microsoft.com/office/drawing/2014/main" id="{2E17E3E6-69CA-448D-AADC-C32E550F54CD}"/>
               </a:ext>
             </a:extLst>
           </p:cNvPr>
@@ -3918,7 +3918,7 @@
           <p:cNvPr id="63" name="biology-heading-title">
             <a:extLst xmlns:a="http://schemas.openxmlformats.org/drawingml/2006/main">
               <a:ext uri="{FF2B5EF4-FFF2-40B4-BE49-F238E27FC236}">
-                <a16:creationId xmlns:a16="http://schemas.microsoft.com/office/drawing/2014/main" id="{2E867ACD-83EF-4CE3-82E9-0F5E0115FCB1}"/>
+                <a16:creationId xmlns:a16="http://schemas.microsoft.com/office/drawing/2014/main" id="{B718EB6A-59F0-46A5-84A4-06B011E4F5B9}"/>
               </a:ext>
             </a:extLst>
           </p:cNvPr>
@@ -3968,7 +3968,7 @@
           <p:cNvPr id="64" name="biology-heading-rule">
             <a:extLst xmlns:a="http://schemas.openxmlformats.org/drawingml/2006/main">
               <a:ext uri="{FF2B5EF4-FFF2-40B4-BE49-F238E27FC236}">
-                <a16:creationId xmlns:a16="http://schemas.microsoft.com/office/drawing/2014/main" id="{13F0BFFC-C85F-492B-A8F3-90568D694B3F}"/>
+                <a16:creationId xmlns:a16="http://schemas.microsoft.com/office/drawing/2014/main" id="{9B0A11E2-1B12-4B09-AA0D-10B8CE598CEA}"/>
               </a:ext>
             </a:extLst>
           </p:cNvPr>
@@ -4001,7 +4001,7 @@
           <p:cNvPr id="65" name="biology-1-value">
             <a:extLst xmlns:a="http://schemas.openxmlformats.org/drawingml/2006/main">
               <a:ext uri="{FF2B5EF4-FFF2-40B4-BE49-F238E27FC236}">
-                <a16:creationId xmlns:a16="http://schemas.microsoft.com/office/drawing/2014/main" id="{C4020184-F93C-49E3-9C33-8581A5C2B9D6}"/>
+                <a16:creationId xmlns:a16="http://schemas.microsoft.com/office/drawing/2014/main" id="{73DDB09E-4FBA-44CB-AF2C-0F6352EDFAD6}"/>
               </a:ext>
             </a:extLst>
           </p:cNvPr>
@@ -4051,7 +4051,7 @@
           <p:cNvPr id="66" name="biology-1-label">
             <a:extLst xmlns:a="http://schemas.openxmlformats.org/drawingml/2006/main">
               <a:ext uri="{FF2B5EF4-FFF2-40B4-BE49-F238E27FC236}">
-                <a16:creationId xmlns:a16="http://schemas.microsoft.com/office/drawing/2014/main" id="{1B2CBB8E-0207-4A19-A2E4-3C75C3A6EAB8}"/>
+                <a16:creationId xmlns:a16="http://schemas.microsoft.com/office/drawing/2014/main" id="{4EE38460-6B2A-40ED-AB01-5D6D0BABE0AA}"/>
               </a:ext>
             </a:extLst>
           </p:cNvPr>
@@ -4101,7 +4101,7 @@
           <p:cNvPr id="67" name="biology-2-value">
             <a:extLst xmlns:a="http://schemas.openxmlformats.org/drawingml/2006/main">
               <a:ext uri="{FF2B5EF4-FFF2-40B4-BE49-F238E27FC236}">
-                <a16:creationId xmlns:a16="http://schemas.microsoft.com/office/drawing/2014/main" id="{D586F97F-A11B-49EA-8E9D-88C4372F734F}"/>
+                <a16:creationId xmlns:a16="http://schemas.microsoft.com/office/drawing/2014/main" id="{9432B7F3-F545-4841-AE24-CBDAA4AE67E4}"/>
               </a:ext>
             </a:extLst>
           </p:cNvPr>
@@ -4151,7 +4151,7 @@
           <p:cNvPr id="68" name="biology-2-label">
             <a:extLst xmlns:a="http://schemas.openxmlformats.org/drawingml/2006/main">
               <a:ext uri="{FF2B5EF4-FFF2-40B4-BE49-F238E27FC236}">
-                <a16:creationId xmlns:a16="http://schemas.microsoft.com/office/drawing/2014/main" id="{023F8947-3C02-47E1-B7F0-DABE7800D34E}"/>
+                <a16:creationId xmlns:a16="http://schemas.microsoft.com/office/drawing/2014/main" id="{6528CE57-4B37-40D2-9ED3-9BBA9A59BB6E}"/>
               </a:ext>
             </a:extLst>
           </p:cNvPr>
@@ -4201,7 +4201,7 @@
           <p:cNvPr id="69" name="biology-3-value">
             <a:extLst xmlns:a="http://schemas.openxmlformats.org/drawingml/2006/main">
               <a:ext uri="{FF2B5EF4-FFF2-40B4-BE49-F238E27FC236}">
-                <a16:creationId xmlns:a16="http://schemas.microsoft.com/office/drawing/2014/main" id="{B89C6F6B-E26C-4BF1-953F-F3778880F6A7}"/>
+                <a16:creationId xmlns:a16="http://schemas.microsoft.com/office/drawing/2014/main" id="{DE3ED3B8-7BB0-4F14-A916-1019032C1C67}"/>
               </a:ext>
             </a:extLst>
           </p:cNvPr>
@@ -4251,7 +4251,7 @@
           <p:cNvPr id="70" name="biology-3-label">
             <a:extLst xmlns:a="http://schemas.openxmlformats.org/drawingml/2006/main">
               <a:ext uri="{FF2B5EF4-FFF2-40B4-BE49-F238E27FC236}">
-                <a16:creationId xmlns:a16="http://schemas.microsoft.com/office/drawing/2014/main" id="{BE9F168C-14FC-4A27-B21B-4ED6FC148754}"/>
+                <a16:creationId xmlns:a16="http://schemas.microsoft.com/office/drawing/2014/main" id="{D49BBFE1-C310-47EF-8885-2E9F801F5B20}"/>
               </a:ext>
             </a:extLst>
           </p:cNvPr>
@@ -4301,7 +4301,7 @@
           <p:cNvPr id="71" name="biology-evidence">
             <a:extLst xmlns:a="http://schemas.openxmlformats.org/drawingml/2006/main">
               <a:ext uri="{FF2B5EF4-FFF2-40B4-BE49-F238E27FC236}">
-                <a16:creationId xmlns:a16="http://schemas.microsoft.com/office/drawing/2014/main" id="{45784491-699E-4FE3-9AD9-52BEB2FB5650}"/>
+                <a16:creationId xmlns:a16="http://schemas.microsoft.com/office/drawing/2014/main" id="{91B3C65B-641E-4782-90F2-9B7EE3D6633A}"/>
               </a:ext>
             </a:extLst>
           </p:cNvPr>
@@ -4351,7 +4351,7 @@
           <p:cNvPr id="72" name="figure-three-frame">
             <a:extLst xmlns:a="http://schemas.openxmlformats.org/drawingml/2006/main">
               <a:ext uri="{FF2B5EF4-FFF2-40B4-BE49-F238E27FC236}">
-                <a16:creationId xmlns:a16="http://schemas.microsoft.com/office/drawing/2014/main" id="{B3B13F2B-6DE8-4B1A-87AE-2288A3CABD20}"/>
+                <a16:creationId xmlns:a16="http://schemas.microsoft.com/office/drawing/2014/main" id="{07A7FDDC-27AB-476E-9495-0A86662E7431}"/>
               </a:ext>
             </a:extLst>
           </p:cNvPr>
@@ -4386,7 +4386,7 @@
           <p:cNvPr id="73" name="figure-three-placeholder">
             <a:extLst xmlns:a="http://schemas.openxmlformats.org/drawingml/2006/main">
               <a:ext uri="{FF2B5EF4-FFF2-40B4-BE49-F238E27FC236}">
-                <a16:creationId xmlns:a16="http://schemas.microsoft.com/office/drawing/2014/main" id="{84B182F5-F0CE-4C20-A909-8DE40AEF0D66}"/>
+                <a16:creationId xmlns:a16="http://schemas.microsoft.com/office/drawing/2014/main" id="{1CF5F4C8-3BD7-4EF5-9473-F7628894611E}"/>
               </a:ext>
             </a:extLst>
           </p:cNvPr>
@@ -4421,7 +4421,7 @@
           <p:cNvPr id="74" name="figure-three-placeholder-label">
             <a:extLst xmlns:a="http://schemas.openxmlformats.org/drawingml/2006/main">
               <a:ext uri="{FF2B5EF4-FFF2-40B4-BE49-F238E27FC236}">
-                <a16:creationId xmlns:a16="http://schemas.microsoft.com/office/drawing/2014/main" id="{DBC4B43C-3261-4EFD-B1B2-B940D5D06280}"/>
+                <a16:creationId xmlns:a16="http://schemas.microsoft.com/office/drawing/2014/main" id="{E9F9F3FC-BDE1-4C4C-8DE6-DD68BE092B71}"/>
               </a:ext>
             </a:extLst>
           </p:cNvPr>
@@ -4471,7 +4471,7 @@
           <p:cNvPr id="75" name="figure-three-caption">
             <a:extLst xmlns:a="http://schemas.openxmlformats.org/drawingml/2006/main">
               <a:ext uri="{FF2B5EF4-FFF2-40B4-BE49-F238E27FC236}">
-                <a16:creationId xmlns:a16="http://schemas.microsoft.com/office/drawing/2014/main" id="{3F189B80-BE36-4558-8B8B-F7469D934F55}"/>
+                <a16:creationId xmlns:a16="http://schemas.microsoft.com/office/drawing/2014/main" id="{B9173E3C-6320-4C3C-855C-236124922E5E}"/>
               </a:ext>
             </a:extLst>
           </p:cNvPr>
@@ -4521,7 +4521,7 @@
           <p:cNvPr id="76" name="figure-three-source">
             <a:extLst xmlns:a="http://schemas.openxmlformats.org/drawingml/2006/main">
               <a:ext uri="{FF2B5EF4-FFF2-40B4-BE49-F238E27FC236}">
-                <a16:creationId xmlns:a16="http://schemas.microsoft.com/office/drawing/2014/main" id="{0D6DF2C6-F1A5-4114-8167-D9E4F13451A0}"/>
+                <a16:creationId xmlns:a16="http://schemas.microsoft.com/office/drawing/2014/main" id="{8B79C14A-2C72-45C0-849B-FD570E9CEC14}"/>
               </a:ext>
             </a:extLst>
           </p:cNvPr>
@@ -4571,7 +4571,7 @@
           <p:cNvPr id="77" name="validation-visual-heading-title">
             <a:extLst xmlns:a="http://schemas.openxmlformats.org/drawingml/2006/main">
               <a:ext uri="{FF2B5EF4-FFF2-40B4-BE49-F238E27FC236}">
-                <a16:creationId xmlns:a16="http://schemas.microsoft.com/office/drawing/2014/main" id="{313EEF53-D589-4075-87A0-0A0FD5F7EDA6}"/>
+                <a16:creationId xmlns:a16="http://schemas.microsoft.com/office/drawing/2014/main" id="{16C226A3-9A9F-400C-950B-38E245DD496C}"/>
               </a:ext>
             </a:extLst>
           </p:cNvPr>
@@ -4621,7 +4621,7 @@
           <p:cNvPr id="78" name="validation-visual-heading-rule">
             <a:extLst xmlns:a="http://schemas.openxmlformats.org/drawingml/2006/main">
               <a:ext uri="{FF2B5EF4-FFF2-40B4-BE49-F238E27FC236}">
-                <a16:creationId xmlns:a16="http://schemas.microsoft.com/office/drawing/2014/main" id="{50C768AC-5486-4860-9635-548C772566FE}"/>
+                <a16:creationId xmlns:a16="http://schemas.microsoft.com/office/drawing/2014/main" id="{456C4669-BB90-45AB-9E46-D270B949925F}"/>
               </a:ext>
             </a:extLst>
           </p:cNvPr>
@@ -4654,7 +4654,7 @@
           <p:cNvPr id="79" name="figure-four-frame">
             <a:extLst xmlns:a="http://schemas.openxmlformats.org/drawingml/2006/main">
               <a:ext uri="{FF2B5EF4-FFF2-40B4-BE49-F238E27FC236}">
-                <a16:creationId xmlns:a16="http://schemas.microsoft.com/office/drawing/2014/main" id="{6644F424-D639-4D3A-8481-20C6AA17D3C4}"/>
+                <a16:creationId xmlns:a16="http://schemas.microsoft.com/office/drawing/2014/main" id="{EEF765AE-0E6A-4704-B437-8FD3316A19D8}"/>
               </a:ext>
             </a:extLst>
           </p:cNvPr>
@@ -4689,7 +4689,7 @@
           <p:cNvPr id="80" name="figure-four-placeholder">
             <a:extLst xmlns:a="http://schemas.openxmlformats.org/drawingml/2006/main">
               <a:ext uri="{FF2B5EF4-FFF2-40B4-BE49-F238E27FC236}">
-                <a16:creationId xmlns:a16="http://schemas.microsoft.com/office/drawing/2014/main" id="{000E1F82-CA9C-45DC-828F-9F748A0CF542}"/>
+                <a16:creationId xmlns:a16="http://schemas.microsoft.com/office/drawing/2014/main" id="{58A2A8FE-97A1-4EB3-B830-22F8687BE0AC}"/>
               </a:ext>
             </a:extLst>
           </p:cNvPr>
@@ -4724,7 +4724,7 @@
           <p:cNvPr id="81" name="figure-four-placeholder-label">
             <a:extLst xmlns:a="http://schemas.openxmlformats.org/drawingml/2006/main">
               <a:ext uri="{FF2B5EF4-FFF2-40B4-BE49-F238E27FC236}">
-                <a16:creationId xmlns:a16="http://schemas.microsoft.com/office/drawing/2014/main" id="{F32E5F5E-39B6-40FD-A618-0310961E6FF9}"/>
+                <a16:creationId xmlns:a16="http://schemas.microsoft.com/office/drawing/2014/main" id="{CF3B771F-2E0C-4DA8-A907-8C176FB33C79}"/>
               </a:ext>
             </a:extLst>
           </p:cNvPr>
@@ -4774,7 +4774,7 @@
           <p:cNvPr id="82" name="figure-four-caption">
             <a:extLst xmlns:a="http://schemas.openxmlformats.org/drawingml/2006/main">
               <a:ext uri="{FF2B5EF4-FFF2-40B4-BE49-F238E27FC236}">
-                <a16:creationId xmlns:a16="http://schemas.microsoft.com/office/drawing/2014/main" id="{5EB0C773-8459-4C28-9C31-CEF2BB9F5E15}"/>
+                <a16:creationId xmlns:a16="http://schemas.microsoft.com/office/drawing/2014/main" id="{ADDE8C6D-692A-4B38-A30A-1848147B698F}"/>
               </a:ext>
             </a:extLst>
           </p:cNvPr>
@@ -4824,7 +4824,7 @@
           <p:cNvPr id="83" name="figure-four-source">
             <a:extLst xmlns:a="http://schemas.openxmlformats.org/drawingml/2006/main">
               <a:ext uri="{FF2B5EF4-FFF2-40B4-BE49-F238E27FC236}">
-                <a16:creationId xmlns:a16="http://schemas.microsoft.com/office/drawing/2014/main" id="{8C5CCCF3-F628-4460-93CA-E5E061955C06}"/>
+                <a16:creationId xmlns:a16="http://schemas.microsoft.com/office/drawing/2014/main" id="{AF1F4F71-F937-4080-9EFC-DF29892BC6FD}"/>
               </a:ext>
             </a:extLst>
           </p:cNvPr>
@@ -4874,7 +4874,7 @@
           <p:cNvPr id="84" name="conclusion-heading-title">
             <a:extLst xmlns:a="http://schemas.openxmlformats.org/drawingml/2006/main">
               <a:ext uri="{FF2B5EF4-FFF2-40B4-BE49-F238E27FC236}">
-                <a16:creationId xmlns:a16="http://schemas.microsoft.com/office/drawing/2014/main" id="{D8F3A937-E002-409F-8135-7632C65D8CE6}"/>
+                <a16:creationId xmlns:a16="http://schemas.microsoft.com/office/drawing/2014/main" id="{865BB500-4EA2-4DD6-91C2-925B5802469C}"/>
               </a:ext>
             </a:extLst>
           </p:cNvPr>
@@ -4924,7 +4924,7 @@
           <p:cNvPr id="85" name="conclusion-heading-rule">
             <a:extLst xmlns:a="http://schemas.openxmlformats.org/drawingml/2006/main">
               <a:ext uri="{FF2B5EF4-FFF2-40B4-BE49-F238E27FC236}">
-                <a16:creationId xmlns:a16="http://schemas.microsoft.com/office/drawing/2014/main" id="{110B648B-5999-4487-94A4-BA204B6D4C27}"/>
+                <a16:creationId xmlns:a16="http://schemas.microsoft.com/office/drawing/2014/main" id="{E197297F-7D31-41C6-B4C9-D103CDFBC183}"/>
               </a:ext>
             </a:extLst>
           </p:cNvPr>
@@ -4957,7 +4957,7 @@
           <p:cNvPr id="86" name="conclusion-panel">
             <a:extLst xmlns:a="http://schemas.openxmlformats.org/drawingml/2006/main">
               <a:ext uri="{FF2B5EF4-FFF2-40B4-BE49-F238E27FC236}">
-                <a16:creationId xmlns:a16="http://schemas.microsoft.com/office/drawing/2014/main" id="{5D60E7B9-5CDF-48B8-B355-C932ACFA690B}"/>
+                <a16:creationId xmlns:a16="http://schemas.microsoft.com/office/drawing/2014/main" id="{4C0BF0C3-2F06-45F7-96A3-D1C3F2F0E2F1}"/>
               </a:ext>
             </a:extLst>
           </p:cNvPr>
@@ -4992,7 +4992,7 @@
           <p:cNvPr id="87" name="conclusion">
             <a:extLst xmlns:a="http://schemas.openxmlformats.org/drawingml/2006/main">
               <a:ext uri="{FF2B5EF4-FFF2-40B4-BE49-F238E27FC236}">
-                <a16:creationId xmlns:a16="http://schemas.microsoft.com/office/drawing/2014/main" id="{D95FCCD3-ACF6-41CE-995F-679B61EDF92E}"/>
+                <a16:creationId xmlns:a16="http://schemas.microsoft.com/office/drawing/2014/main" id="{831A3FD4-2C35-4E62-8D25-2124B22B3D8C}"/>
               </a:ext>
             </a:extLst>
           </p:cNvPr>
@@ -5042,7 +5042,7 @@
           <p:cNvPr id="88" name="conclusion-evidence">
             <a:extLst xmlns:a="http://schemas.openxmlformats.org/drawingml/2006/main">
               <a:ext uri="{FF2B5EF4-FFF2-40B4-BE49-F238E27FC236}">
-                <a16:creationId xmlns:a16="http://schemas.microsoft.com/office/drawing/2014/main" id="{0C4C0C57-4B6B-4770-A275-578DC9C1CAEC}"/>
+                <a16:creationId xmlns:a16="http://schemas.microsoft.com/office/drawing/2014/main" id="{B1678E51-0303-4992-ABF0-34F68A939A18}"/>
               </a:ext>
             </a:extLst>
           </p:cNvPr>
@@ -5092,7 +5092,7 @@
           <p:cNvPr id="89" name="footer-band">
             <a:extLst xmlns:a="http://schemas.openxmlformats.org/drawingml/2006/main">
               <a:ext uri="{FF2B5EF4-FFF2-40B4-BE49-F238E27FC236}">
-                <a16:creationId xmlns:a16="http://schemas.microsoft.com/office/drawing/2014/main" id="{2BB1D5D1-9F58-4BD3-9BCE-FAE377524EB4}"/>
+                <a16:creationId xmlns:a16="http://schemas.microsoft.com/office/drawing/2014/main" id="{34343522-840F-4D39-8CF7-1C87E19C30CB}"/>
               </a:ext>
             </a:extLst>
           </p:cNvPr>
@@ -5125,7 +5125,7 @@
           <p:cNvPr id="90" name="footer-source">
             <a:extLst xmlns:a="http://schemas.openxmlformats.org/drawingml/2006/main">
               <a:ext uri="{FF2B5EF4-FFF2-40B4-BE49-F238E27FC236}">
-                <a16:creationId xmlns:a16="http://schemas.microsoft.com/office/drawing/2014/main" id="{C1A180BD-D5C9-4FE7-86E3-58B3EE66B14B}"/>
+                <a16:creationId xmlns:a16="http://schemas.microsoft.com/office/drawing/2014/main" id="{C0958340-FB78-4834-8D6F-77684669C80B}"/>
               </a:ext>
             </a:extLst>
           </p:cNvPr>
@@ -5175,7 +5175,7 @@
           <p:cNvPr id="91" name="footer-status">
             <a:extLst xmlns:a="http://schemas.openxmlformats.org/drawingml/2006/main">
               <a:ext uri="{FF2B5EF4-FFF2-40B4-BE49-F238E27FC236}">
-                <a16:creationId xmlns:a16="http://schemas.microsoft.com/office/drawing/2014/main" id="{25645857-95D1-4153-AAE0-A75BC692E630}"/>
+                <a16:creationId xmlns:a16="http://schemas.microsoft.com/office/drawing/2014/main" id="{0191B8C7-2AA1-49C3-B0CF-91DE828EEF0E}"/>
               </a:ext>
             </a:extLst>
           </p:cNvPr>
@@ -5223,7 +5223,7 @@
     </p:spTree>
     <p:extLst>
       <p:ext uri="{BB962C8B-B14F-4D97-AF65-F5344CB8AC3E}">
-        <p14:creationId xmlns:p14="http://schemas.microsoft.com/office/powerpoint/2010/main" val="2092950805"/>
+        <p14:creationId xmlns:p14="http://schemas.microsoft.com/office/powerpoint/2010/main" val="246606555"/>
       </p:ext>
     </p:extLst>
   </p:cSld>
